--- a/public/kit/decks/session-vet-opportunity.pptx
+++ b/public/kit/decks/session-vet-opportunity.pptx
@@ -1747,7 +1747,7 @@
     <p:bg>
       <p:bgPr>
         <a:solidFill>
-          <a:srgbClr val="0E1230"/>
+          <a:srgbClr val="161A24"/>
         </a:solidFill>
       </p:bgPr>
     </p:bg>
@@ -1767,7 +1767,7 @@
       </p:grpSpPr>
       <p:pic>
         <p:nvPicPr>
-          <p:cNvPr id="2" name="Image 0" descr="D:\startups\my-projects\DevUpProject\hirefromwebsite\public\images\deck-methods.jpg">    </p:cNvPr>
+          <p:cNvPr id="2" name="Image 0" descr="C:\Users\Developer\Desktop\hirefromph\hirefromph\public\images\deck-methods.jpg">    </p:cNvPr>
           <p:cNvPicPr>
             <a:picLocks noChangeAspect="1"/>
           </p:cNvPicPr>
@@ -1803,13 +1803,13 @@
             <a:avLst/>
           </a:prstGeom>
           <a:solidFill>
-            <a:srgbClr val="0E1230">
+            <a:srgbClr val="161A24">
               <a:alpha val="72000"/>
             </a:srgbClr>
           </a:solidFill>
           <a:ln w="12700">
             <a:solidFill>
-              <a:srgbClr val="0E1230">
+              <a:srgbClr val="161A24">
                 <a:alpha val="0"/>
               </a:srgbClr>
             </a:solidFill>
@@ -1844,7 +1844,7 @@
             <a:r>
               <a:rPr lang="en-US" sz="1400" b="1" spc="300" kern="0" dirty="0">
                 <a:solidFill>
-                  <a:srgbClr val="C9C8FF"/>
+                  <a:srgbClr val="AFC5EE"/>
                 </a:solidFill>
                 <a:latin typeface="Inter" pitchFamily="34" charset="0"/>
                 <a:ea typeface="Inter" pitchFamily="34" charset="-122"/>
@@ -1928,7 +1928,7 @@
             <a:r>
               <a:rPr lang="en-US" sz="2200" dirty="0">
                 <a:solidFill>
-                  <a:srgbClr val="D6D7EA"/>
+                  <a:srgbClr val="EAF0FB"/>
                 </a:solidFill>
                 <a:latin typeface="Inter" pitchFamily="34" charset="0"/>
                 <a:ea typeface="Inter" pitchFamily="34" charset="-122"/>
@@ -1967,7 +1967,7 @@
             <a:r>
               <a:rPr lang="en-US" sz="1100" dirty="0">
                 <a:solidFill>
-                  <a:srgbClr val="D6D7EA"/>
+                  <a:srgbClr val="EAF0FB"/>
                 </a:solidFill>
                 <a:latin typeface="Inter" pitchFamily="34" charset="0"/>
                 <a:ea typeface="Inter" pitchFamily="34" charset="-122"/>
@@ -2006,7 +2006,7 @@
             <a:r>
               <a:rPr lang="en-US" sz="1100" dirty="0">
                 <a:solidFill>
-                  <a:srgbClr val="D6D7EA"/>
+                  <a:srgbClr val="EAF0FB"/>
                 </a:solidFill>
                 <a:latin typeface="Inter" pitchFamily="34" charset="0"/>
                 <a:ea typeface="Inter" pitchFamily="34" charset="-122"/>
@@ -2077,7 +2077,7 @@
             <a:r>
               <a:rPr lang="en-US" sz="1400" b="1" spc="300" kern="0" dirty="0">
                 <a:solidFill>
-                  <a:srgbClr val="4B4EF6"/>
+                  <a:srgbClr val="043882"/>
                 </a:solidFill>
                 <a:latin typeface="Inter" pitchFamily="34" charset="0"/>
                 <a:ea typeface="Inter" pitchFamily="34" charset="-122"/>
@@ -2119,7 +2119,7 @@
             <a:r>
               <a:rPr lang="en-US" sz="4600" b="1" dirty="0">
                 <a:solidFill>
-                  <a:srgbClr val="0E1230"/>
+                  <a:srgbClr val="161A24"/>
                 </a:solidFill>
                 <a:latin typeface="Inter" pitchFamily="34" charset="0"/>
                 <a:ea typeface="Inter" pitchFamily="34" charset="-122"/>
@@ -2161,7 +2161,7 @@
             <a:r>
               <a:rPr lang="en-US" sz="2000" dirty="0">
                 <a:solidFill>
-                  <a:srgbClr val="4A4F66"/>
+                  <a:srgbClr val="464C5C"/>
                 </a:solidFill>
                 <a:latin typeface="Inter" pitchFamily="34" charset="0"/>
                 <a:ea typeface="Inter" pitchFamily="34" charset="-122"/>
@@ -2200,7 +2200,7 @@
             <a:r>
               <a:rPr lang="en-US" sz="1100" dirty="0">
                 <a:solidFill>
-                  <a:srgbClr val="6B7087"/>
+                  <a:srgbClr val="5F6575"/>
                 </a:solidFill>
                 <a:latin typeface="Inter" pitchFamily="34" charset="0"/>
                 <a:ea typeface="Inter" pitchFamily="34" charset="-122"/>
@@ -2239,7 +2239,7 @@
             <a:r>
               <a:rPr lang="en-US" sz="1100" dirty="0">
                 <a:solidFill>
-                  <a:srgbClr val="6B7087"/>
+                  <a:srgbClr val="5F6575"/>
                 </a:solidFill>
                 <a:latin typeface="Inter" pitchFamily="34" charset="0"/>
                 <a:ea typeface="Inter" pitchFamily="34" charset="-122"/>
@@ -2265,7 +2265,7 @@
     <p:bg>
       <p:bgPr>
         <a:solidFill>
-          <a:srgbClr val="0E1230"/>
+          <a:srgbClr val="161A24"/>
         </a:solidFill>
       </p:bgPr>
     </p:bg>
@@ -2285,7 +2285,7 @@
       </p:grpSpPr>
       <p:pic>
         <p:nvPicPr>
-          <p:cNvPr id="2" name="Image 0" descr="D:\startups\my-projects\DevUpProject\hirefromwebsite\public\images\deck-close.jpg">    </p:cNvPr>
+          <p:cNvPr id="2" name="Image 0" descr="C:\Users\Developer\Desktop\hirefromph\hirefromph\public\images\deck-close.jpg">    </p:cNvPr>
           <p:cNvPicPr>
             <a:picLocks noChangeAspect="1"/>
           </p:cNvPicPr>
@@ -2321,13 +2321,13 @@
             <a:avLst/>
           </a:prstGeom>
           <a:solidFill>
-            <a:srgbClr val="0E1230">
+            <a:srgbClr val="161A24">
               <a:alpha val="72000"/>
             </a:srgbClr>
           </a:solidFill>
           <a:ln w="12700">
             <a:solidFill>
-              <a:srgbClr val="0E1230">
+              <a:srgbClr val="161A24">
                 <a:alpha val="0"/>
               </a:srgbClr>
             </a:solidFill>
@@ -2362,7 +2362,7 @@
             <a:r>
               <a:rPr lang="en-US" sz="1400" b="1" spc="300" kern="0" dirty="0">
                 <a:solidFill>
-                  <a:srgbClr val="C9C8FF"/>
+                  <a:srgbClr val="AFC5EE"/>
                 </a:solidFill>
                 <a:latin typeface="Inter" pitchFamily="34" charset="0"/>
                 <a:ea typeface="Inter" pitchFamily="34" charset="-122"/>
@@ -2446,7 +2446,7 @@
             <a:r>
               <a:rPr lang="en-US" sz="2200" dirty="0">
                 <a:solidFill>
-                  <a:srgbClr val="D6D7EA"/>
+                  <a:srgbClr val="EAF0FB"/>
                 </a:solidFill>
                 <a:latin typeface="Inter" pitchFamily="34" charset="0"/>
                 <a:ea typeface="Inter" pitchFamily="34" charset="-122"/>
@@ -2485,7 +2485,7 @@
             <a:r>
               <a:rPr lang="en-US" sz="1100" dirty="0">
                 <a:solidFill>
-                  <a:srgbClr val="D6D7EA"/>
+                  <a:srgbClr val="EAF0FB"/>
                 </a:solidFill>
                 <a:latin typeface="Inter" pitchFamily="34" charset="0"/>
                 <a:ea typeface="Inter" pitchFamily="34" charset="-122"/>
@@ -2524,7 +2524,7 @@
             <a:r>
               <a:rPr lang="en-US" sz="1100" dirty="0">
                 <a:solidFill>
-                  <a:srgbClr val="D6D7EA"/>
+                  <a:srgbClr val="EAF0FB"/>
                 </a:solidFill>
                 <a:latin typeface="Inter" pitchFamily="34" charset="0"/>
                 <a:ea typeface="Inter" pitchFamily="34" charset="-122"/>
@@ -2595,7 +2595,7 @@
             <a:r>
               <a:rPr lang="en-US" sz="1400" b="1" spc="300" kern="0" dirty="0">
                 <a:solidFill>
-                  <a:srgbClr val="4B4EF6"/>
+                  <a:srgbClr val="043882"/>
                 </a:solidFill>
                 <a:latin typeface="Inter" pitchFamily="34" charset="0"/>
                 <a:ea typeface="Inter" pitchFamily="34" charset="-122"/>
@@ -2637,7 +2637,7 @@
             <a:r>
               <a:rPr lang="en-US" sz="4600" b="1" dirty="0">
                 <a:solidFill>
-                  <a:srgbClr val="0E1230"/>
+                  <a:srgbClr val="161A24"/>
                 </a:solidFill>
                 <a:latin typeface="Inter" pitchFamily="34" charset="0"/>
                 <a:ea typeface="Inter" pitchFamily="34" charset="-122"/>
@@ -2679,7 +2679,7 @@
             <a:r>
               <a:rPr lang="en-US" sz="2000" dirty="0">
                 <a:solidFill>
-                  <a:srgbClr val="4A4F66"/>
+                  <a:srgbClr val="464C5C"/>
                 </a:solidFill>
                 <a:latin typeface="Inter" pitchFamily="34" charset="0"/>
                 <a:ea typeface="Inter" pitchFamily="34" charset="-122"/>
@@ -2718,7 +2718,7 @@
             <a:r>
               <a:rPr lang="en-US" sz="1100" dirty="0">
                 <a:solidFill>
-                  <a:srgbClr val="6B7087"/>
+                  <a:srgbClr val="5F6575"/>
                 </a:solidFill>
                 <a:latin typeface="Inter" pitchFamily="34" charset="0"/>
                 <a:ea typeface="Inter" pitchFamily="34" charset="-122"/>
@@ -2757,7 +2757,7 @@
             <a:r>
               <a:rPr lang="en-US" sz="1100" dirty="0">
                 <a:solidFill>
-                  <a:srgbClr val="6B7087"/>
+                  <a:srgbClr val="5F6575"/>
                 </a:solidFill>
                 <a:latin typeface="Inter" pitchFamily="34" charset="0"/>
                 <a:ea typeface="Inter" pitchFamily="34" charset="-122"/>
@@ -2803,7 +2803,7 @@
       </p:grpSpPr>
       <p:pic>
         <p:nvPicPr>
-          <p:cNvPr id="2" name="Image 0" descr="D:\startups\my-projects\DevUpProject\hirefromwebsite\public\images\deck\icons\vet.png">    </p:cNvPr>
+          <p:cNvPr id="2" name="Image 0" descr="C:\Users\Developer\Desktop\hirefromph\hirefromph\public\images\deck\icons\vet.png">    </p:cNvPr>
           <p:cNvPicPr>
             <a:picLocks noChangeAspect="1"/>
           </p:cNvPicPr>
@@ -2852,7 +2852,7 @@
             <a:r>
               <a:rPr lang="en-US" sz="1400" b="1" spc="300" kern="0" dirty="0">
                 <a:solidFill>
-                  <a:srgbClr val="4B4EF6"/>
+                  <a:srgbClr val="043882"/>
                 </a:solidFill>
                 <a:latin typeface="Inter" pitchFamily="34" charset="0"/>
                 <a:ea typeface="Inter" pitchFamily="34" charset="-122"/>
@@ -2894,7 +2894,7 @@
             <a:r>
               <a:rPr lang="en-US" sz="3800" b="1" dirty="0">
                 <a:solidFill>
-                  <a:srgbClr val="0E1230"/>
+                  <a:srgbClr val="161A24"/>
                 </a:solidFill>
                 <a:latin typeface="Inter" pitchFamily="34" charset="0"/>
                 <a:ea typeface="Inter" pitchFamily="34" charset="-122"/>
@@ -2938,7 +2938,7 @@
             <a:r>
               <a:rPr lang="en-US" sz="1700" dirty="0">
                 <a:solidFill>
-                  <a:srgbClr val="0E1230"/>
+                  <a:srgbClr val="161A24"/>
                 </a:solidFill>
                 <a:latin typeface="Inter" pitchFamily="34" charset="0"/>
                 <a:ea typeface="Inter" pitchFamily="34" charset="-122"/>
@@ -2960,7 +2960,7 @@
             <a:r>
               <a:rPr lang="en-US" sz="1700" dirty="0">
                 <a:solidFill>
-                  <a:srgbClr val="0E1230"/>
+                  <a:srgbClr val="161A24"/>
                 </a:solidFill>
                 <a:latin typeface="Inter" pitchFamily="34" charset="0"/>
                 <a:ea typeface="Inter" pitchFamily="34" charset="-122"/>
@@ -2982,7 +2982,7 @@
             <a:r>
               <a:rPr lang="en-US" sz="1700" dirty="0">
                 <a:solidFill>
-                  <a:srgbClr val="0E1230"/>
+                  <a:srgbClr val="161A24"/>
                 </a:solidFill>
                 <a:latin typeface="Inter" pitchFamily="34" charset="0"/>
                 <a:ea typeface="Inter" pitchFamily="34" charset="-122"/>
@@ -3009,11 +3009,11 @@
             <a:avLst/>
           </a:prstGeom>
           <a:solidFill>
-            <a:srgbClr val="EEEDFF"/>
+            <a:srgbClr val="EAF0FB"/>
           </a:solidFill>
           <a:ln w="12700">
             <a:solidFill>
-              <a:srgbClr val="EEEDFF"/>
+              <a:srgbClr val="EAF0FB"/>
             </a:solidFill>
             <a:prstDash val="solid"/>
           </a:ln>
@@ -3046,7 +3046,7 @@
             <a:r>
               <a:rPr lang="en-US" sz="1500" dirty="0">
                 <a:solidFill>
-                  <a:srgbClr val="0E1230"/>
+                  <a:srgbClr val="161A24"/>
                 </a:solidFill>
                 <a:latin typeface="Inter" pitchFamily="34" charset="0"/>
                 <a:ea typeface="Inter" pitchFamily="34" charset="-122"/>
@@ -3085,7 +3085,7 @@
             <a:r>
               <a:rPr lang="en-US" sz="1100" dirty="0">
                 <a:solidFill>
-                  <a:srgbClr val="6B7087"/>
+                  <a:srgbClr val="5F6575"/>
                 </a:solidFill>
                 <a:latin typeface="Inter" pitchFamily="34" charset="0"/>
                 <a:ea typeface="Inter" pitchFamily="34" charset="-122"/>
@@ -3124,7 +3124,7 @@
             <a:r>
               <a:rPr lang="en-US" sz="1100" dirty="0">
                 <a:solidFill>
-                  <a:srgbClr val="6B7087"/>
+                  <a:srgbClr val="5F6575"/>
                 </a:solidFill>
                 <a:latin typeface="Inter" pitchFamily="34" charset="0"/>
                 <a:ea typeface="Inter" pitchFamily="34" charset="-122"/>
@@ -3150,7 +3150,7 @@
     <p:bg>
       <p:bgPr>
         <a:solidFill>
-          <a:srgbClr val="F7F6FF"/>
+          <a:srgbClr val="F3F4F6"/>
         </a:solidFill>
       </p:bgPr>
     </p:bg>
@@ -3195,7 +3195,7 @@
             <a:r>
               <a:rPr lang="en-US" sz="1400" b="1" spc="300" kern="0" dirty="0">
                 <a:solidFill>
-                  <a:srgbClr val="4B4EF6"/>
+                  <a:srgbClr val="043882"/>
                 </a:solidFill>
                 <a:latin typeface="Inter" pitchFamily="34" charset="0"/>
                 <a:ea typeface="Inter" pitchFamily="34" charset="-122"/>
@@ -3237,7 +3237,7 @@
             <a:r>
               <a:rPr lang="en-US" sz="3800" b="1" dirty="0">
                 <a:solidFill>
-                  <a:srgbClr val="0E1230"/>
+                  <a:srgbClr val="161A24"/>
                 </a:solidFill>
                 <a:latin typeface="Inter" pitchFamily="34" charset="0"/>
                 <a:ea typeface="Inter" pitchFamily="34" charset="-122"/>
@@ -3280,7 +3280,7 @@
             <a:r>
               <a:rPr lang="en-US" sz="1700" dirty="0">
                 <a:solidFill>
-                  <a:srgbClr val="0E1230"/>
+                  <a:srgbClr val="161A24"/>
                 </a:solidFill>
                 <a:latin typeface="Inter" pitchFamily="34" charset="0"/>
                 <a:ea typeface="Inter" pitchFamily="34" charset="-122"/>
@@ -3301,7 +3301,7 @@
             <a:r>
               <a:rPr lang="en-US" sz="1700" dirty="0">
                 <a:solidFill>
-                  <a:srgbClr val="0E1230"/>
+                  <a:srgbClr val="161A24"/>
                 </a:solidFill>
                 <a:latin typeface="Inter" pitchFamily="34" charset="0"/>
                 <a:ea typeface="Inter" pitchFamily="34" charset="-122"/>
@@ -3322,7 +3322,7 @@
             <a:r>
               <a:rPr lang="en-US" sz="1700" dirty="0">
                 <a:solidFill>
-                  <a:srgbClr val="0E1230"/>
+                  <a:srgbClr val="161A24"/>
                 </a:solidFill>
                 <a:latin typeface="Inter" pitchFamily="34" charset="0"/>
                 <a:ea typeface="Inter" pitchFamily="34" charset="-122"/>
@@ -3343,7 +3343,7 @@
             <a:r>
               <a:rPr lang="en-US" sz="1700" dirty="0">
                 <a:solidFill>
-                  <a:srgbClr val="0E1230"/>
+                  <a:srgbClr val="161A24"/>
                 </a:solidFill>
                 <a:latin typeface="Inter" pitchFamily="34" charset="0"/>
                 <a:ea typeface="Inter" pitchFamily="34" charset="-122"/>
@@ -3364,7 +3364,7 @@
             <a:r>
               <a:rPr lang="en-US" sz="1700" dirty="0">
                 <a:solidFill>
-                  <a:srgbClr val="0E1230"/>
+                  <a:srgbClr val="161A24"/>
                 </a:solidFill>
                 <a:latin typeface="Inter" pitchFamily="34" charset="0"/>
                 <a:ea typeface="Inter" pitchFamily="34" charset="-122"/>
@@ -3403,7 +3403,7 @@
             <a:r>
               <a:rPr lang="en-US" sz="1100" dirty="0">
                 <a:solidFill>
-                  <a:srgbClr val="6B7087"/>
+                  <a:srgbClr val="5F6575"/>
                 </a:solidFill>
                 <a:latin typeface="Inter" pitchFamily="34" charset="0"/>
                 <a:ea typeface="Inter" pitchFamily="34" charset="-122"/>
@@ -3442,7 +3442,7 @@
             <a:r>
               <a:rPr lang="en-US" sz="1100" dirty="0">
                 <a:solidFill>
-                  <a:srgbClr val="6B7087"/>
+                  <a:srgbClr val="5F6575"/>
                 </a:solidFill>
                 <a:latin typeface="Inter" pitchFamily="34" charset="0"/>
                 <a:ea typeface="Inter" pitchFamily="34" charset="-122"/>
@@ -3468,7 +3468,7 @@
     <p:bg>
       <p:bgPr>
         <a:solidFill>
-          <a:srgbClr val="F7F6FF"/>
+          <a:srgbClr val="F3F4F6"/>
         </a:solidFill>
       </p:bgPr>
     </p:bg>
@@ -3513,7 +3513,7 @@
             <a:r>
               <a:rPr lang="en-US" sz="1400" b="1" spc="300" kern="0" dirty="0">
                 <a:solidFill>
-                  <a:srgbClr val="4B4EF6"/>
+                  <a:srgbClr val="043882"/>
                 </a:solidFill>
                 <a:latin typeface="Inter" pitchFamily="34" charset="0"/>
                 <a:ea typeface="Inter" pitchFamily="34" charset="-122"/>
@@ -3555,7 +3555,7 @@
             <a:r>
               <a:rPr lang="en-US" sz="3800" b="1" dirty="0">
                 <a:solidFill>
-                  <a:srgbClr val="0E1230"/>
+                  <a:srgbClr val="161A24"/>
                 </a:solidFill>
                 <a:latin typeface="Inter" pitchFamily="34" charset="0"/>
                 <a:ea typeface="Inter" pitchFamily="34" charset="-122"/>
@@ -3597,7 +3597,7 @@
             <a:r>
               <a:rPr lang="en-US" sz="1800" dirty="0">
                 <a:solidFill>
-                  <a:srgbClr val="4A4F66"/>
+                  <a:srgbClr val="464C5C"/>
                 </a:solidFill>
                 <a:latin typeface="Inter" pitchFamily="34" charset="0"/>
                 <a:ea typeface="Inter" pitchFamily="34" charset="-122"/>
@@ -3640,7 +3640,7 @@
             <a:r>
               <a:rPr lang="en-US" sz="1700" dirty="0">
                 <a:solidFill>
-                  <a:srgbClr val="0E1230"/>
+                  <a:srgbClr val="161A24"/>
                 </a:solidFill>
                 <a:latin typeface="Inter" pitchFamily="34" charset="0"/>
                 <a:ea typeface="Inter" pitchFamily="34" charset="-122"/>
@@ -3661,7 +3661,7 @@
             <a:r>
               <a:rPr lang="en-US" sz="1700" dirty="0">
                 <a:solidFill>
-                  <a:srgbClr val="0E1230"/>
+                  <a:srgbClr val="161A24"/>
                 </a:solidFill>
                 <a:latin typeface="Inter" pitchFamily="34" charset="0"/>
                 <a:ea typeface="Inter" pitchFamily="34" charset="-122"/>
@@ -3682,7 +3682,7 @@
             <a:r>
               <a:rPr lang="en-US" sz="1700" dirty="0">
                 <a:solidFill>
-                  <a:srgbClr val="0E1230"/>
+                  <a:srgbClr val="161A24"/>
                 </a:solidFill>
                 <a:latin typeface="Inter" pitchFamily="34" charset="0"/>
                 <a:ea typeface="Inter" pitchFamily="34" charset="-122"/>
@@ -3703,7 +3703,7 @@
             <a:r>
               <a:rPr lang="en-US" sz="1700" dirty="0">
                 <a:solidFill>
-                  <a:srgbClr val="0E1230"/>
+                  <a:srgbClr val="161A24"/>
                 </a:solidFill>
                 <a:latin typeface="Inter" pitchFamily="34" charset="0"/>
                 <a:ea typeface="Inter" pitchFamily="34" charset="-122"/>
@@ -3742,7 +3742,7 @@
             <a:r>
               <a:rPr lang="en-US" sz="1100" dirty="0">
                 <a:solidFill>
-                  <a:srgbClr val="6B7087"/>
+                  <a:srgbClr val="5F6575"/>
                 </a:solidFill>
                 <a:latin typeface="Inter" pitchFamily="34" charset="0"/>
                 <a:ea typeface="Inter" pitchFamily="34" charset="-122"/>
@@ -3781,7 +3781,7 @@
             <a:r>
               <a:rPr lang="en-US" sz="1100" dirty="0">
                 <a:solidFill>
-                  <a:srgbClr val="6B7087"/>
+                  <a:srgbClr val="5F6575"/>
                 </a:solidFill>
                 <a:latin typeface="Inter" pitchFamily="34" charset="0"/>
                 <a:ea typeface="Inter" pitchFamily="34" charset="-122"/>
@@ -3807,7 +3807,7 @@
     <p:bg>
       <p:bgPr>
         <a:solidFill>
-          <a:srgbClr val="F7F6FF"/>
+          <a:srgbClr val="F3F4F6"/>
         </a:solidFill>
       </p:bgPr>
     </p:bg>
@@ -3852,7 +3852,7 @@
             <a:r>
               <a:rPr lang="en-US" sz="1400" b="1" spc="300" kern="0" dirty="0">
                 <a:solidFill>
-                  <a:srgbClr val="4B4EF6"/>
+                  <a:srgbClr val="043882"/>
                 </a:solidFill>
                 <a:latin typeface="Inter" pitchFamily="34" charset="0"/>
                 <a:ea typeface="Inter" pitchFamily="34" charset="-122"/>
@@ -3881,11 +3881,11 @@
             </a:avLst>
           </a:prstGeom>
           <a:solidFill>
-            <a:srgbClr val="4B4EF6"/>
+            <a:srgbClr val="043882"/>
           </a:solidFill>
           <a:ln w="12700">
             <a:solidFill>
-              <a:srgbClr val="4B4EF6"/>
+              <a:srgbClr val="043882"/>
             </a:solidFill>
             <a:prstDash val="solid"/>
           </a:ln>
@@ -3960,7 +3960,7 @@
             <a:r>
               <a:rPr lang="en-US" sz="3800" b="1" dirty="0">
                 <a:solidFill>
-                  <a:srgbClr val="0E1230"/>
+                  <a:srgbClr val="161A24"/>
                 </a:solidFill>
                 <a:latin typeface="Inter" pitchFamily="34" charset="0"/>
                 <a:ea typeface="Inter" pitchFamily="34" charset="-122"/>
@@ -4002,7 +4002,7 @@
             <a:r>
               <a:rPr lang="en-US" sz="1800" dirty="0">
                 <a:solidFill>
-                  <a:srgbClr val="4A4F66"/>
+                  <a:srgbClr val="464C5C"/>
                 </a:solidFill>
                 <a:latin typeface="Inter" pitchFamily="34" charset="0"/>
                 <a:ea typeface="Inter" pitchFamily="34" charset="-122"/>
@@ -4046,7 +4046,7 @@
             <a:r>
               <a:rPr lang="en-US" sz="1700" dirty="0">
                 <a:solidFill>
-                  <a:srgbClr val="0E1230"/>
+                  <a:srgbClr val="161A24"/>
                 </a:solidFill>
                 <a:latin typeface="Inter" pitchFamily="34" charset="0"/>
                 <a:ea typeface="Inter" pitchFamily="34" charset="-122"/>
@@ -4068,7 +4068,7 @@
             <a:r>
               <a:rPr lang="en-US" sz="1700" dirty="0">
                 <a:solidFill>
-                  <a:srgbClr val="0E1230"/>
+                  <a:srgbClr val="161A24"/>
                 </a:solidFill>
                 <a:latin typeface="Inter" pitchFamily="34" charset="0"/>
                 <a:ea typeface="Inter" pitchFamily="34" charset="-122"/>
@@ -4090,7 +4090,7 @@
             <a:r>
               <a:rPr lang="en-US" sz="1700" dirty="0">
                 <a:solidFill>
-                  <a:srgbClr val="0E1230"/>
+                  <a:srgbClr val="161A24"/>
                 </a:solidFill>
                 <a:latin typeface="Inter" pitchFamily="34" charset="0"/>
                 <a:ea typeface="Inter" pitchFamily="34" charset="-122"/>
@@ -4112,7 +4112,7 @@
             <a:r>
               <a:rPr lang="en-US" sz="1700" dirty="0">
                 <a:solidFill>
-                  <a:srgbClr val="0E1230"/>
+                  <a:srgbClr val="161A24"/>
                 </a:solidFill>
                 <a:latin typeface="Inter" pitchFamily="34" charset="0"/>
                 <a:ea typeface="Inter" pitchFamily="34" charset="-122"/>
@@ -4134,7 +4134,7 @@
             <a:r>
               <a:rPr lang="en-US" sz="1700" dirty="0">
                 <a:solidFill>
-                  <a:srgbClr val="0E1230"/>
+                  <a:srgbClr val="161A24"/>
                 </a:solidFill>
                 <a:latin typeface="Inter" pitchFamily="34" charset="0"/>
                 <a:ea typeface="Inter" pitchFamily="34" charset="-122"/>
@@ -4173,7 +4173,7 @@
             <a:r>
               <a:rPr lang="en-US" sz="1100" dirty="0">
                 <a:solidFill>
-                  <a:srgbClr val="6B7087"/>
+                  <a:srgbClr val="5F6575"/>
                 </a:solidFill>
                 <a:latin typeface="Inter" pitchFamily="34" charset="0"/>
                 <a:ea typeface="Inter" pitchFamily="34" charset="-122"/>
@@ -4212,7 +4212,7 @@
             <a:r>
               <a:rPr lang="en-US" sz="1100" dirty="0">
                 <a:solidFill>
-                  <a:srgbClr val="6B7087"/>
+                  <a:srgbClr val="5F6575"/>
                 </a:solidFill>
                 <a:latin typeface="Inter" pitchFamily="34" charset="0"/>
                 <a:ea typeface="Inter" pitchFamily="34" charset="-122"/>
@@ -4238,7 +4238,7 @@
     <p:bg>
       <p:bgPr>
         <a:solidFill>
-          <a:srgbClr val="F7F6FF"/>
+          <a:srgbClr val="F3F4F6"/>
         </a:solidFill>
       </p:bgPr>
     </p:bg>
@@ -4283,7 +4283,7 @@
             <a:r>
               <a:rPr lang="en-US" sz="1400" b="1" spc="300" kern="0" dirty="0">
                 <a:solidFill>
-                  <a:srgbClr val="4B4EF6"/>
+                  <a:srgbClr val="043882"/>
                 </a:solidFill>
                 <a:latin typeface="Inter" pitchFamily="34" charset="0"/>
                 <a:ea typeface="Inter" pitchFamily="34" charset="-122"/>
@@ -4325,7 +4325,7 @@
             <a:r>
               <a:rPr lang="en-US" sz="3800" b="1" dirty="0">
                 <a:solidFill>
-                  <a:srgbClr val="0E1230"/>
+                  <a:srgbClr val="161A24"/>
                 </a:solidFill>
                 <a:latin typeface="Inter" pitchFamily="34" charset="0"/>
                 <a:ea typeface="Inter" pitchFamily="34" charset="-122"/>
@@ -4368,7 +4368,7 @@
             <a:r>
               <a:rPr lang="en-US" sz="1700" dirty="0">
                 <a:solidFill>
-                  <a:srgbClr val="0E1230"/>
+                  <a:srgbClr val="161A24"/>
                 </a:solidFill>
                 <a:latin typeface="Inter" pitchFamily="34" charset="0"/>
                 <a:ea typeface="Inter" pitchFamily="34" charset="-122"/>
@@ -4389,7 +4389,7 @@
             <a:r>
               <a:rPr lang="en-US" sz="1700" dirty="0">
                 <a:solidFill>
-                  <a:srgbClr val="0E1230"/>
+                  <a:srgbClr val="161A24"/>
                 </a:solidFill>
                 <a:latin typeface="Inter" pitchFamily="34" charset="0"/>
                 <a:ea typeface="Inter" pitchFamily="34" charset="-122"/>
@@ -4410,7 +4410,7 @@
             <a:r>
               <a:rPr lang="en-US" sz="1700" dirty="0">
                 <a:solidFill>
-                  <a:srgbClr val="0E1230"/>
+                  <a:srgbClr val="161A24"/>
                 </a:solidFill>
                 <a:latin typeface="Inter" pitchFamily="34" charset="0"/>
                 <a:ea typeface="Inter" pitchFamily="34" charset="-122"/>
@@ -4431,7 +4431,7 @@
             <a:r>
               <a:rPr lang="en-US" sz="1700" dirty="0">
                 <a:solidFill>
-                  <a:srgbClr val="0E1230"/>
+                  <a:srgbClr val="161A24"/>
                 </a:solidFill>
                 <a:latin typeface="Inter" pitchFamily="34" charset="0"/>
                 <a:ea typeface="Inter" pitchFamily="34" charset="-122"/>
@@ -4452,7 +4452,7 @@
             <a:r>
               <a:rPr lang="en-US" sz="1700" dirty="0">
                 <a:solidFill>
-                  <a:srgbClr val="0E1230"/>
+                  <a:srgbClr val="161A24"/>
                 </a:solidFill>
                 <a:latin typeface="Inter" pitchFamily="34" charset="0"/>
                 <a:ea typeface="Inter" pitchFamily="34" charset="-122"/>
@@ -4491,7 +4491,7 @@
             <a:r>
               <a:rPr lang="en-US" sz="1100" dirty="0">
                 <a:solidFill>
-                  <a:srgbClr val="6B7087"/>
+                  <a:srgbClr val="5F6575"/>
                 </a:solidFill>
                 <a:latin typeface="Inter" pitchFamily="34" charset="0"/>
                 <a:ea typeface="Inter" pitchFamily="34" charset="-122"/>
@@ -4530,7 +4530,7 @@
             <a:r>
               <a:rPr lang="en-US" sz="1100" dirty="0">
                 <a:solidFill>
-                  <a:srgbClr val="6B7087"/>
+                  <a:srgbClr val="5F6575"/>
                 </a:solidFill>
                 <a:latin typeface="Inter" pitchFamily="34" charset="0"/>
                 <a:ea typeface="Inter" pitchFamily="34" charset="-122"/>
@@ -4556,7 +4556,7 @@
     <p:bg>
       <p:bgPr>
         <a:solidFill>
-          <a:srgbClr val="F7F6FF"/>
+          <a:srgbClr val="F3F4F6"/>
         </a:solidFill>
       </p:bgPr>
     </p:bg>
@@ -4601,7 +4601,7 @@
             <a:r>
               <a:rPr lang="en-US" sz="1400" b="1" spc="300" kern="0" dirty="0">
                 <a:solidFill>
-                  <a:srgbClr val="4B4EF6"/>
+                  <a:srgbClr val="043882"/>
                 </a:solidFill>
                 <a:latin typeface="Inter" pitchFamily="34" charset="0"/>
                 <a:ea typeface="Inter" pitchFamily="34" charset="-122"/>
@@ -4643,7 +4643,7 @@
             <a:r>
               <a:rPr lang="en-US" sz="3800" b="1" dirty="0">
                 <a:solidFill>
-                  <a:srgbClr val="0E1230"/>
+                  <a:srgbClr val="161A24"/>
                 </a:solidFill>
                 <a:latin typeface="Inter" pitchFamily="34" charset="0"/>
                 <a:ea typeface="Inter" pitchFamily="34" charset="-122"/>
@@ -4686,7 +4686,7 @@
             <a:r>
               <a:rPr lang="en-US" sz="1700" dirty="0">
                 <a:solidFill>
-                  <a:srgbClr val="0E1230"/>
+                  <a:srgbClr val="161A24"/>
                 </a:solidFill>
                 <a:latin typeface="Inter" pitchFamily="34" charset="0"/>
                 <a:ea typeface="Inter" pitchFamily="34" charset="-122"/>
@@ -4707,7 +4707,7 @@
             <a:r>
               <a:rPr lang="en-US" sz="1700" dirty="0">
                 <a:solidFill>
-                  <a:srgbClr val="0E1230"/>
+                  <a:srgbClr val="161A24"/>
                 </a:solidFill>
                 <a:latin typeface="Inter" pitchFamily="34" charset="0"/>
                 <a:ea typeface="Inter" pitchFamily="34" charset="-122"/>
@@ -4728,7 +4728,7 @@
             <a:r>
               <a:rPr lang="en-US" sz="1700" dirty="0">
                 <a:solidFill>
-                  <a:srgbClr val="0E1230"/>
+                  <a:srgbClr val="161A24"/>
                 </a:solidFill>
                 <a:latin typeface="Inter" pitchFamily="34" charset="0"/>
                 <a:ea typeface="Inter" pitchFamily="34" charset="-122"/>
@@ -4749,7 +4749,7 @@
             <a:r>
               <a:rPr lang="en-US" sz="1700" dirty="0">
                 <a:solidFill>
-                  <a:srgbClr val="0E1230"/>
+                  <a:srgbClr val="161A24"/>
                 </a:solidFill>
                 <a:latin typeface="Inter" pitchFamily="34" charset="0"/>
                 <a:ea typeface="Inter" pitchFamily="34" charset="-122"/>
@@ -4788,7 +4788,7 @@
             <a:r>
               <a:rPr lang="en-US" sz="1100" dirty="0">
                 <a:solidFill>
-                  <a:srgbClr val="6B7087"/>
+                  <a:srgbClr val="5F6575"/>
                 </a:solidFill>
                 <a:latin typeface="Inter" pitchFamily="34" charset="0"/>
                 <a:ea typeface="Inter" pitchFamily="34" charset="-122"/>
@@ -4827,7 +4827,7 @@
             <a:r>
               <a:rPr lang="en-US" sz="1100" dirty="0">
                 <a:solidFill>
-                  <a:srgbClr val="6B7087"/>
+                  <a:srgbClr val="5F6575"/>
                 </a:solidFill>
                 <a:latin typeface="Inter" pitchFamily="34" charset="0"/>
                 <a:ea typeface="Inter" pitchFamily="34" charset="-122"/>
@@ -4898,7 +4898,7 @@
             <a:r>
               <a:rPr lang="en-US" sz="1400" b="1" spc="300" kern="0" dirty="0">
                 <a:solidFill>
-                  <a:srgbClr val="4B4EF6"/>
+                  <a:srgbClr val="043882"/>
                 </a:solidFill>
                 <a:latin typeface="Inter" pitchFamily="34" charset="0"/>
                 <a:ea typeface="Inter" pitchFamily="34" charset="-122"/>
@@ -4940,7 +4940,7 @@
             <a:r>
               <a:rPr lang="en-US" sz="4600" b="1" dirty="0">
                 <a:solidFill>
-                  <a:srgbClr val="0E1230"/>
+                  <a:srgbClr val="161A24"/>
                 </a:solidFill>
                 <a:latin typeface="Inter" pitchFamily="34" charset="0"/>
                 <a:ea typeface="Inter" pitchFamily="34" charset="-122"/>
@@ -4982,7 +4982,7 @@
             <a:r>
               <a:rPr lang="en-US" sz="2000" dirty="0">
                 <a:solidFill>
-                  <a:srgbClr val="4A4F66"/>
+                  <a:srgbClr val="464C5C"/>
                 </a:solidFill>
                 <a:latin typeface="Inter" pitchFamily="34" charset="0"/>
                 <a:ea typeface="Inter" pitchFamily="34" charset="-122"/>
@@ -5021,7 +5021,7 @@
             <a:r>
               <a:rPr lang="en-US" sz="1100" dirty="0">
                 <a:solidFill>
-                  <a:srgbClr val="6B7087"/>
+                  <a:srgbClr val="5F6575"/>
                 </a:solidFill>
                 <a:latin typeface="Inter" pitchFamily="34" charset="0"/>
                 <a:ea typeface="Inter" pitchFamily="34" charset="-122"/>
@@ -5060,7 +5060,7 @@
             <a:r>
               <a:rPr lang="en-US" sz="1100" dirty="0">
                 <a:solidFill>
-                  <a:srgbClr val="6B7087"/>
+                  <a:srgbClr val="5F6575"/>
                 </a:solidFill>
                 <a:latin typeface="Inter" pitchFamily="34" charset="0"/>
                 <a:ea typeface="Inter" pitchFamily="34" charset="-122"/>
